--- a/ppt/Python13-PIP.pptx
+++ b/ppt/Python13-PIP.pptx
@@ -606,35 +606,35 @@
           <a:p>
             <a:pPr lvl="0"/>
             <a:r>
-              <a:rPr lang="fr-FR" noProof="0" smtClean="0"/>
+              <a:rPr lang="fr-FR" noProof="0"/>
               <a:t>Cliquez pour modifier les styles du texte du masque</a:t>
             </a:r>
           </a:p>
           <a:p>
             <a:pPr lvl="1"/>
             <a:r>
-              <a:rPr lang="fr-FR" noProof="0" smtClean="0"/>
+              <a:rPr lang="fr-FR" noProof="0"/>
               <a:t>Deuxième niveau</a:t>
             </a:r>
           </a:p>
           <a:p>
             <a:pPr lvl="2"/>
             <a:r>
-              <a:rPr lang="fr-FR" noProof="0" smtClean="0"/>
+              <a:rPr lang="fr-FR" noProof="0"/>
               <a:t>Troisième niveau</a:t>
             </a:r>
           </a:p>
           <a:p>
             <a:pPr lvl="3"/>
             <a:r>
-              <a:rPr lang="fr-FR" noProof="0" smtClean="0"/>
+              <a:rPr lang="fr-FR" noProof="0"/>
               <a:t>Quatrième niveau</a:t>
             </a:r>
           </a:p>
           <a:p>
             <a:pPr lvl="4"/>
             <a:r>
-              <a:rPr lang="fr-FR" noProof="0" smtClean="0"/>
+              <a:rPr lang="fr-FR" noProof="0"/>
               <a:t>Cinquième niveau</a:t>
             </a:r>
           </a:p>
@@ -922,10 +922,9 @@
           <a:lstStyle/>
           <a:p>
             <a:r>
-              <a:rPr lang="fr-FR" smtClean="0"/>
+              <a:rPr lang="fr-FR"/>
               <a:t>Cliquez pour modifier le style du titre</a:t>
             </a:r>
-            <a:endParaRPr lang="fr-FR"/>
           </a:p>
         </p:txBody>
       </p:sp>
@@ -987,10 +986,9 @@
           </a:lstStyle>
           <a:p>
             <a:r>
-              <a:rPr lang="fr-FR" smtClean="0"/>
+              <a:rPr lang="fr-FR"/>
               <a:t>Cliquez pour modifier le style des sous-titres du masque</a:t>
             </a:r>
-            <a:endParaRPr lang="fr-FR"/>
           </a:p>
         </p:txBody>
       </p:sp>
@@ -1045,10 +1043,9 @@
           <a:lstStyle/>
           <a:p>
             <a:r>
-              <a:rPr lang="fr-FR" smtClean="0"/>
+              <a:rPr lang="fr-FR"/>
               <a:t>Cliquez pour modifier le style du titre</a:t>
             </a:r>
-            <a:endParaRPr lang="fr-FR"/>
           </a:p>
         </p:txBody>
       </p:sp>
@@ -1074,38 +1071,37 @@
           <a:p>
             <a:pPr lvl="0"/>
             <a:r>
-              <a:rPr lang="fr-FR" smtClean="0"/>
+              <a:rPr lang="fr-FR"/>
               <a:t>Cliquez pour modifier les styles du texte du masque</a:t>
             </a:r>
           </a:p>
           <a:p>
             <a:pPr lvl="1"/>
             <a:r>
-              <a:rPr lang="fr-FR" smtClean="0"/>
+              <a:rPr lang="fr-FR"/>
               <a:t>Deuxième niveau</a:t>
             </a:r>
           </a:p>
           <a:p>
             <a:pPr lvl="2"/>
             <a:r>
-              <a:rPr lang="fr-FR" smtClean="0"/>
+              <a:rPr lang="fr-FR"/>
               <a:t>Troisième niveau</a:t>
             </a:r>
           </a:p>
           <a:p>
             <a:pPr lvl="3"/>
             <a:r>
-              <a:rPr lang="fr-FR" smtClean="0"/>
+              <a:rPr lang="fr-FR"/>
               <a:t>Quatrième niveau</a:t>
             </a:r>
           </a:p>
           <a:p>
             <a:pPr lvl="4"/>
             <a:r>
-              <a:rPr lang="fr-FR" smtClean="0"/>
+              <a:rPr lang="fr-FR"/>
               <a:t>Cinquième niveau</a:t>
             </a:r>
-            <a:endParaRPr lang="fr-FR"/>
           </a:p>
         </p:txBody>
       </p:sp>
@@ -1164,10 +1160,9 @@
           </a:lstStyle>
           <a:p>
             <a:r>
-              <a:rPr lang="fr-FR" dirty="0" smtClean="0"/>
+              <a:rPr lang="fr-FR" dirty="0"/>
               <a:t>Cliquez pour modifier le style du titre</a:t>
             </a:r>
-            <a:endParaRPr lang="fr-FR" dirty="0"/>
           </a:p>
         </p:txBody>
       </p:sp>
@@ -1193,38 +1188,37 @@
           <a:p>
             <a:pPr lvl="0"/>
             <a:r>
-              <a:rPr lang="fr-FR" dirty="0" smtClean="0"/>
+              <a:rPr lang="fr-FR" dirty="0"/>
               <a:t>Cliquez pour modifier les styles du texte du masque</a:t>
             </a:r>
           </a:p>
           <a:p>
             <a:pPr lvl="1"/>
             <a:r>
-              <a:rPr lang="fr-FR" dirty="0" smtClean="0"/>
+              <a:rPr lang="fr-FR" dirty="0"/>
               <a:t>Deuxième niveau</a:t>
             </a:r>
           </a:p>
           <a:p>
             <a:pPr lvl="2"/>
             <a:r>
-              <a:rPr lang="fr-FR" dirty="0" smtClean="0"/>
+              <a:rPr lang="fr-FR" dirty="0"/>
               <a:t>Troisième niveau</a:t>
             </a:r>
           </a:p>
           <a:p>
             <a:pPr lvl="3"/>
             <a:r>
-              <a:rPr lang="fr-FR" dirty="0" smtClean="0"/>
+              <a:rPr lang="fr-FR" dirty="0"/>
               <a:t>Quatrième niveau</a:t>
             </a:r>
           </a:p>
           <a:p>
             <a:pPr lvl="4"/>
             <a:r>
-              <a:rPr lang="fr-FR" dirty="0" smtClean="0"/>
+              <a:rPr lang="fr-FR" dirty="0"/>
               <a:t>Cinquième niveau</a:t>
             </a:r>
-            <a:endParaRPr lang="fr-FR" dirty="0"/>
           </a:p>
         </p:txBody>
       </p:sp>
@@ -1274,10 +1268,9 @@
           <a:lstStyle/>
           <a:p>
             <a:r>
-              <a:rPr lang="fr-FR" smtClean="0"/>
+              <a:rPr lang="fr-FR"/>
               <a:t>Cliquez pour modifier le style du titre</a:t>
             </a:r>
-            <a:endParaRPr lang="fr-FR"/>
           </a:p>
         </p:txBody>
       </p:sp>
@@ -1331,38 +1324,37 @@
           <a:p>
             <a:pPr lvl="0"/>
             <a:r>
-              <a:rPr lang="fr-FR" smtClean="0"/>
+              <a:rPr lang="fr-FR"/>
               <a:t>Cliquez pour modifier les styles du texte du masque</a:t>
             </a:r>
           </a:p>
           <a:p>
             <a:pPr lvl="1"/>
             <a:r>
-              <a:rPr lang="fr-FR" smtClean="0"/>
+              <a:rPr lang="fr-FR"/>
               <a:t>Deuxième niveau</a:t>
             </a:r>
           </a:p>
           <a:p>
             <a:pPr lvl="2"/>
             <a:r>
-              <a:rPr lang="fr-FR" smtClean="0"/>
+              <a:rPr lang="fr-FR"/>
               <a:t>Troisième niveau</a:t>
             </a:r>
           </a:p>
           <a:p>
             <a:pPr lvl="3"/>
             <a:r>
-              <a:rPr lang="fr-FR" smtClean="0"/>
+              <a:rPr lang="fr-FR"/>
               <a:t>Quatrième niveau</a:t>
             </a:r>
           </a:p>
           <a:p>
             <a:pPr lvl="4"/>
             <a:r>
-              <a:rPr lang="fr-FR" smtClean="0"/>
+              <a:rPr lang="fr-FR"/>
               <a:t>Cinquième niveau</a:t>
             </a:r>
-            <a:endParaRPr lang="fr-FR"/>
           </a:p>
         </p:txBody>
       </p:sp>
@@ -1416,38 +1408,37 @@
           <a:p>
             <a:pPr lvl="0"/>
             <a:r>
-              <a:rPr lang="fr-FR" smtClean="0"/>
+              <a:rPr lang="fr-FR"/>
               <a:t>Cliquez pour modifier les styles du texte du masque</a:t>
             </a:r>
           </a:p>
           <a:p>
             <a:pPr lvl="1"/>
             <a:r>
-              <a:rPr lang="fr-FR" smtClean="0"/>
+              <a:rPr lang="fr-FR"/>
               <a:t>Deuxième niveau</a:t>
             </a:r>
           </a:p>
           <a:p>
             <a:pPr lvl="2"/>
             <a:r>
-              <a:rPr lang="fr-FR" smtClean="0"/>
+              <a:rPr lang="fr-FR"/>
               <a:t>Troisième niveau</a:t>
             </a:r>
           </a:p>
           <a:p>
             <a:pPr lvl="3"/>
             <a:r>
-              <a:rPr lang="fr-FR" smtClean="0"/>
+              <a:rPr lang="fr-FR"/>
               <a:t>Quatrième niveau</a:t>
             </a:r>
           </a:p>
           <a:p>
             <a:pPr lvl="4"/>
             <a:r>
-              <a:rPr lang="fr-FR" smtClean="0"/>
+              <a:rPr lang="fr-FR"/>
               <a:t>Cinquième niveau</a:t>
             </a:r>
-            <a:endParaRPr lang="fr-FR"/>
           </a:p>
         </p:txBody>
       </p:sp>
@@ -1506,10 +1497,9 @@
           </a:lstStyle>
           <a:p>
             <a:r>
-              <a:rPr lang="fr-FR" smtClean="0"/>
+              <a:rPr lang="fr-FR"/>
               <a:t>Cliquez pour modifier le style du titre</a:t>
             </a:r>
-            <a:endParaRPr lang="fr-FR"/>
           </a:p>
         </p:txBody>
       </p:sp>
@@ -1572,7 +1562,7 @@
           <a:p>
             <a:pPr lvl="0"/>
             <a:r>
-              <a:rPr lang="fr-FR" smtClean="0"/>
+              <a:rPr lang="fr-FR"/>
               <a:t>Cliquez pour modifier les styles du texte du masque</a:t>
             </a:r>
           </a:p>
@@ -1628,38 +1618,37 @@
           <a:p>
             <a:pPr lvl="0"/>
             <a:r>
-              <a:rPr lang="fr-FR" smtClean="0"/>
+              <a:rPr lang="fr-FR"/>
               <a:t>Cliquez pour modifier les styles du texte du masque</a:t>
             </a:r>
           </a:p>
           <a:p>
             <a:pPr lvl="1"/>
             <a:r>
-              <a:rPr lang="fr-FR" smtClean="0"/>
+              <a:rPr lang="fr-FR"/>
               <a:t>Deuxième niveau</a:t>
             </a:r>
           </a:p>
           <a:p>
             <a:pPr lvl="2"/>
             <a:r>
-              <a:rPr lang="fr-FR" smtClean="0"/>
+              <a:rPr lang="fr-FR"/>
               <a:t>Troisième niveau</a:t>
             </a:r>
           </a:p>
           <a:p>
             <a:pPr lvl="3"/>
             <a:r>
-              <a:rPr lang="fr-FR" smtClean="0"/>
+              <a:rPr lang="fr-FR"/>
               <a:t>Quatrième niveau</a:t>
             </a:r>
           </a:p>
           <a:p>
             <a:pPr lvl="4"/>
             <a:r>
-              <a:rPr lang="fr-FR" smtClean="0"/>
+              <a:rPr lang="fr-FR"/>
               <a:t>Cinquième niveau</a:t>
             </a:r>
-            <a:endParaRPr lang="fr-FR"/>
           </a:p>
         </p:txBody>
       </p:sp>
@@ -1722,7 +1711,7 @@
           <a:p>
             <a:pPr lvl="0"/>
             <a:r>
-              <a:rPr lang="fr-FR" smtClean="0"/>
+              <a:rPr lang="fr-FR"/>
               <a:t>Cliquez pour modifier les styles du texte du masque</a:t>
             </a:r>
           </a:p>
@@ -1778,38 +1767,37 @@
           <a:p>
             <a:pPr lvl="0"/>
             <a:r>
-              <a:rPr lang="fr-FR" smtClean="0"/>
+              <a:rPr lang="fr-FR"/>
               <a:t>Cliquez pour modifier les styles du texte du masque</a:t>
             </a:r>
           </a:p>
           <a:p>
             <a:pPr lvl="1"/>
             <a:r>
-              <a:rPr lang="fr-FR" smtClean="0"/>
+              <a:rPr lang="fr-FR"/>
               <a:t>Deuxième niveau</a:t>
             </a:r>
           </a:p>
           <a:p>
             <a:pPr lvl="2"/>
             <a:r>
-              <a:rPr lang="fr-FR" smtClean="0"/>
+              <a:rPr lang="fr-FR"/>
               <a:t>Troisième niveau</a:t>
             </a:r>
           </a:p>
           <a:p>
             <a:pPr lvl="3"/>
             <a:r>
-              <a:rPr lang="fr-FR" smtClean="0"/>
+              <a:rPr lang="fr-FR"/>
               <a:t>Quatrième niveau</a:t>
             </a:r>
           </a:p>
           <a:p>
             <a:pPr lvl="4"/>
             <a:r>
-              <a:rPr lang="fr-FR" smtClean="0"/>
+              <a:rPr lang="fr-FR"/>
               <a:t>Cinquième niveau</a:t>
             </a:r>
-            <a:endParaRPr lang="fr-FR"/>
           </a:p>
         </p:txBody>
       </p:sp>
@@ -1859,10 +1847,9 @@
           <a:lstStyle/>
           <a:p>
             <a:r>
-              <a:rPr lang="fr-FR" smtClean="0"/>
+              <a:rPr lang="fr-FR"/>
               <a:t>Cliquez pour modifier le style du titre</a:t>
             </a:r>
-            <a:endParaRPr lang="fr-FR"/>
           </a:p>
         </p:txBody>
       </p:sp>
@@ -1951,10 +1938,9 @@
           </a:lstStyle>
           <a:p>
             <a:r>
-              <a:rPr lang="fr-FR" smtClean="0"/>
+              <a:rPr lang="fr-FR"/>
               <a:t>Cliquez pour modifier le style du titre</a:t>
             </a:r>
-            <a:endParaRPr lang="fr-FR"/>
           </a:p>
         </p:txBody>
       </p:sp>
@@ -2008,38 +1994,37 @@
           <a:p>
             <a:pPr lvl="0"/>
             <a:r>
-              <a:rPr lang="fr-FR" smtClean="0"/>
+              <a:rPr lang="fr-FR"/>
               <a:t>Cliquez pour modifier les styles du texte du masque</a:t>
             </a:r>
           </a:p>
           <a:p>
             <a:pPr lvl="1"/>
             <a:r>
-              <a:rPr lang="fr-FR" smtClean="0"/>
+              <a:rPr lang="fr-FR"/>
               <a:t>Deuxième niveau</a:t>
             </a:r>
           </a:p>
           <a:p>
             <a:pPr lvl="2"/>
             <a:r>
-              <a:rPr lang="fr-FR" smtClean="0"/>
+              <a:rPr lang="fr-FR"/>
               <a:t>Troisième niveau</a:t>
             </a:r>
           </a:p>
           <a:p>
             <a:pPr lvl="3"/>
             <a:r>
-              <a:rPr lang="fr-FR" smtClean="0"/>
+              <a:rPr lang="fr-FR"/>
               <a:t>Quatrième niveau</a:t>
             </a:r>
           </a:p>
           <a:p>
             <a:pPr lvl="4"/>
             <a:r>
-              <a:rPr lang="fr-FR" smtClean="0"/>
+              <a:rPr lang="fr-FR"/>
               <a:t>Cinquième niveau</a:t>
             </a:r>
-            <a:endParaRPr lang="fr-FR"/>
           </a:p>
         </p:txBody>
       </p:sp>
@@ -2102,7 +2087,7 @@
           <a:p>
             <a:pPr lvl="0"/>
             <a:r>
-              <a:rPr lang="fr-FR" smtClean="0"/>
+              <a:rPr lang="fr-FR"/>
               <a:t>Cliquez pour modifier les styles du texte du masque</a:t>
             </a:r>
           </a:p>
@@ -2163,10 +2148,9 @@
           </a:lstStyle>
           <a:p>
             <a:r>
-              <a:rPr lang="fr-FR" smtClean="0"/>
+              <a:rPr lang="fr-FR"/>
               <a:t>Cliquez pour modifier le style du titre</a:t>
             </a:r>
-            <a:endParaRPr lang="fr-FR"/>
           </a:p>
         </p:txBody>
       </p:sp>
@@ -2228,7 +2212,7 @@
           </a:lstStyle>
           <a:p>
             <a:pPr lvl="0"/>
-            <a:endParaRPr lang="fr-FR" noProof="0" smtClean="0"/>
+            <a:endParaRPr lang="fr-FR" noProof="0"/>
           </a:p>
         </p:txBody>
       </p:sp>
@@ -2291,7 +2275,7 @@
           <a:p>
             <a:pPr lvl="0"/>
             <a:r>
-              <a:rPr lang="fr-FR" smtClean="0"/>
+              <a:rPr lang="fr-FR"/>
               <a:t>Cliquez pour modifier les styles du texte du masque</a:t>
             </a:r>
           </a:p>
@@ -2343,10 +2327,9 @@
           <a:lstStyle/>
           <a:p>
             <a:r>
-              <a:rPr lang="fr-FR" smtClean="0"/>
+              <a:rPr lang="fr-FR"/>
               <a:t>Cliquez pour modifier le style du titre</a:t>
             </a:r>
-            <a:endParaRPr lang="fr-FR"/>
           </a:p>
         </p:txBody>
       </p:sp>
@@ -2367,38 +2350,37 @@
           <a:p>
             <a:pPr lvl="0"/>
             <a:r>
-              <a:rPr lang="fr-FR" smtClean="0"/>
+              <a:rPr lang="fr-FR"/>
               <a:t>Cliquez pour modifier les styles du texte du masque</a:t>
             </a:r>
           </a:p>
           <a:p>
             <a:pPr lvl="1"/>
             <a:r>
-              <a:rPr lang="fr-FR" smtClean="0"/>
+              <a:rPr lang="fr-FR"/>
               <a:t>Deuxième niveau</a:t>
             </a:r>
           </a:p>
           <a:p>
             <a:pPr lvl="2"/>
             <a:r>
-              <a:rPr lang="fr-FR" smtClean="0"/>
+              <a:rPr lang="fr-FR"/>
               <a:t>Troisième niveau</a:t>
             </a:r>
           </a:p>
           <a:p>
             <a:pPr lvl="3"/>
             <a:r>
-              <a:rPr lang="fr-FR" smtClean="0"/>
+              <a:rPr lang="fr-FR"/>
               <a:t>Quatrième niveau</a:t>
             </a:r>
           </a:p>
           <a:p>
             <a:pPr lvl="4"/>
             <a:r>
-              <a:rPr lang="fr-FR" smtClean="0"/>
+              <a:rPr lang="fr-FR"/>
               <a:t>Cinquième niveau</a:t>
             </a:r>
-            <a:endParaRPr lang="fr-FR"/>
           </a:p>
         </p:txBody>
       </p:sp>
@@ -2579,7 +2561,7 @@
             <a:pPr eaLnBrk="1" hangingPunct="1">
               <a:defRPr/>
             </a:pPr>
-            <a:endParaRPr lang="fr-FR" altLang="fr-FR" smtClean="0"/>
+            <a:endParaRPr lang="fr-FR" altLang="fr-FR"/>
           </a:p>
         </p:txBody>
       </p:sp>
@@ -2733,7 +2715,7 @@
               <a:defRPr/>
             </a:pPr>
             <a:r>
-              <a:rPr lang="fr-FR" sz="1200" dirty="0" smtClean="0"/>
+              <a:rPr lang="fr-FR" sz="1200" dirty="0"/>
               <a:t>Page </a:t>
             </a:r>
             <a:fld id="{E218E9B1-FD08-4C80-902E-210BA2967D0D}" type="slidenum">
@@ -2746,7 +2728,7 @@
               </a:pPr>
               <a:t>‹N°›</a:t>
             </a:fld>
-            <a:endParaRPr lang="fr-FR" dirty="0" smtClean="0">
+            <a:endParaRPr lang="fr-FR" dirty="0">
               <a:latin typeface="Times New Roman" pitchFamily="18" charset="0"/>
             </a:endParaRPr>
           </a:p>
@@ -2902,10 +2884,10 @@
               <a:defRPr/>
             </a:pPr>
             <a:r>
-              <a:rPr lang="fr-FR" sz="1600" dirty="0" smtClean="0"/>
+              <a:rPr lang="fr-FR" sz="1600" dirty="0"/>
               <a:t>Python</a:t>
             </a:r>
-            <a:endParaRPr lang="fr-FR" dirty="0" smtClean="0">
+            <a:endParaRPr lang="fr-FR" dirty="0">
               <a:latin typeface="Times New Roman" pitchFamily="18" charset="0"/>
             </a:endParaRPr>
           </a:p>
@@ -2963,7 +2945,7 @@
           <a:p>
             <a:pPr lvl="0"/>
             <a:r>
-              <a:rPr lang="fr-FR" altLang="fr-FR" smtClean="0"/>
+              <a:rPr lang="fr-FR" altLang="fr-FR"/>
               <a:t>Cliquez pour modifier le style du titre du masque</a:t>
             </a:r>
           </a:p>
@@ -3021,35 +3003,35 @@
           <a:p>
             <a:pPr lvl="0"/>
             <a:r>
-              <a:rPr lang="fr-FR" altLang="fr-FR" smtClean="0"/>
+              <a:rPr lang="fr-FR" altLang="fr-FR"/>
               <a:t>Cliquez pour modifier les styles du texte du masque</a:t>
             </a:r>
           </a:p>
           <a:p>
             <a:pPr lvl="1"/>
             <a:r>
-              <a:rPr lang="fr-FR" altLang="fr-FR" smtClean="0"/>
+              <a:rPr lang="fr-FR" altLang="fr-FR"/>
               <a:t>Deuxième niveau</a:t>
             </a:r>
           </a:p>
           <a:p>
             <a:pPr lvl="2"/>
             <a:r>
-              <a:rPr lang="fr-FR" altLang="fr-FR" smtClean="0"/>
+              <a:rPr lang="fr-FR" altLang="fr-FR"/>
               <a:t>Troisième niveau</a:t>
             </a:r>
           </a:p>
           <a:p>
             <a:pPr lvl="3"/>
             <a:r>
-              <a:rPr lang="fr-FR" altLang="fr-FR" smtClean="0"/>
+              <a:rPr lang="fr-FR" altLang="fr-FR"/>
               <a:t>Quatrième niveau</a:t>
             </a:r>
           </a:p>
           <a:p>
             <a:pPr lvl="4"/>
             <a:r>
-              <a:rPr lang="fr-FR" altLang="fr-FR" smtClean="0"/>
+              <a:rPr lang="fr-FR" altLang="fr-FR"/>
               <a:t>Cinquième niveau</a:t>
             </a:r>
           </a:p>
@@ -3205,10 +3187,10 @@
               <a:defRPr/>
             </a:pPr>
             <a:r>
-              <a:rPr lang="fr-FR" sz="1200" smtClean="0"/>
+              <a:rPr lang="fr-FR" sz="1200"/>
               <a:t>© Cyril Vincent Conseil</a:t>
             </a:r>
-            <a:endParaRPr lang="fr-FR" smtClean="0">
+            <a:endParaRPr lang="fr-FR">
               <a:latin typeface="Times New Roman" pitchFamily="18" charset="0"/>
             </a:endParaRPr>
           </a:p>
@@ -3690,14 +3672,14 @@
           <a:p>
             <a:pPr eaLnBrk="1" hangingPunct="1"/>
             <a:r>
-              <a:rPr lang="fr-FR" altLang="fr-FR" dirty="0" smtClean="0"/>
+              <a:rPr lang="fr-FR" altLang="fr-FR" dirty="0"/>
               <a:t>Chapitre 13</a:t>
             </a:r>
           </a:p>
           <a:p>
             <a:pPr eaLnBrk="1" hangingPunct="1"/>
             <a:r>
-              <a:rPr lang="fr-FR" altLang="fr-FR" dirty="0" smtClean="0"/>
+              <a:rPr lang="fr-FR" altLang="fr-FR" dirty="0"/>
               <a:t>PIP</a:t>
             </a:r>
           </a:p>
@@ -3749,13 +3731,6 @@
   <p:clrMapOvr>
     <a:masterClrMapping/>
   </p:clrMapOvr>
-  <p:timing>
-    <p:tnLst>
-      <p:par>
-        <p:cTn id="1" dur="indefinite" restart="never" nodeType="tmRoot"/>
-      </p:par>
-    </p:tnLst>
-  </p:timing>
 </p:sld>
 </file>
 
@@ -3792,10 +3767,9 @@
           <a:lstStyle/>
           <a:p>
             <a:r>
-              <a:rPr lang="fr-FR" dirty="0" smtClean="0"/>
+              <a:rPr lang="fr-FR" dirty="0"/>
               <a:t>PIP</a:t>
             </a:r>
-            <a:endParaRPr lang="fr-FR" dirty="0"/>
           </a:p>
         </p:txBody>
       </p:sp>
@@ -3815,98 +3789,102 @@
           <a:lstStyle/>
           <a:p>
             <a:r>
-              <a:rPr lang="fr-FR" dirty="0" smtClean="0"/>
+              <a:rPr lang="fr-FR" dirty="0"/>
               <a:t>Gestionnaire de package Python</a:t>
             </a:r>
           </a:p>
           <a:p>
             <a:pPr lvl="1"/>
             <a:r>
-              <a:rPr lang="fr-FR" dirty="0" smtClean="0"/>
+              <a:rPr lang="fr-FR" dirty="0"/>
               <a:t>PIP Install Package</a:t>
             </a:r>
           </a:p>
           <a:p>
             <a:r>
-              <a:rPr lang="fr-FR" dirty="0" smtClean="0"/>
+              <a:rPr lang="fr-FR" dirty="0"/>
               <a:t>Dépôt de package</a:t>
             </a:r>
           </a:p>
           <a:p>
             <a:pPr lvl="1"/>
             <a:r>
-              <a:rPr lang="fr-FR" dirty="0" smtClean="0"/>
+              <a:rPr lang="fr-FR" dirty="0"/>
               <a:t>Python Package Index </a:t>
             </a:r>
             <a:r>
-              <a:rPr lang="fr-FR" dirty="0" err="1" smtClean="0"/>
+              <a:rPr lang="fr-FR" dirty="0" err="1"/>
               <a:t>PyPI</a:t>
             </a:r>
-            <a:endParaRPr lang="fr-FR" dirty="0" smtClean="0"/>
-          </a:p>
-          <a:p>
-            <a:r>
-              <a:rPr lang="fr-FR" dirty="0" smtClean="0"/>
+            <a:endParaRPr lang="fr-FR" dirty="0"/>
+          </a:p>
+          <a:p>
+            <a:r>
+              <a:rPr lang="fr-FR" dirty="0"/>
               <a:t>Utilisation</a:t>
             </a:r>
           </a:p>
           <a:p>
             <a:pPr lvl="1"/>
             <a:r>
-              <a:rPr lang="fr-FR" dirty="0" smtClean="0"/>
+              <a:rPr lang="fr-FR" dirty="0"/>
               <a:t>PIP </a:t>
             </a:r>
             <a:r>
-              <a:rPr lang="fr-FR" dirty="0" err="1" smtClean="0"/>
+              <a:rPr lang="fr-FR" dirty="0" err="1"/>
               <a:t>install</a:t>
             </a:r>
             <a:r>
-              <a:rPr lang="fr-FR" dirty="0" smtClean="0"/>
+              <a:rPr lang="fr-FR" dirty="0"/>
               <a:t> </a:t>
             </a:r>
             <a:r>
-              <a:rPr lang="fr-FR" dirty="0" err="1" smtClean="0"/>
+              <a:rPr lang="fr-FR" dirty="0" err="1"/>
               <a:t>packageName</a:t>
             </a:r>
-            <a:endParaRPr lang="fr-FR" dirty="0" smtClean="0"/>
+            <a:endParaRPr lang="fr-FR" dirty="0"/>
           </a:p>
           <a:p>
             <a:pPr lvl="1"/>
             <a:r>
-              <a:rPr lang="fr-FR" dirty="0" smtClean="0"/>
+              <a:rPr lang="fr-FR" dirty="0"/>
               <a:t>PIP </a:t>
             </a:r>
             <a:r>
-              <a:rPr lang="fr-FR" dirty="0" err="1" smtClean="0"/>
+              <a:rPr lang="fr-FR" dirty="0" err="1"/>
               <a:t>uninstall</a:t>
             </a:r>
             <a:r>
-              <a:rPr lang="fr-FR" dirty="0" smtClean="0"/>
+              <a:rPr lang="fr-FR" dirty="0"/>
               <a:t> </a:t>
             </a:r>
             <a:r>
-              <a:rPr lang="fr-FR" dirty="0" err="1" smtClean="0"/>
+              <a:rPr lang="fr-FR" dirty="0" err="1"/>
               <a:t>packageName</a:t>
             </a:r>
-            <a:endParaRPr lang="fr-FR" dirty="0" smtClean="0"/>
+            <a:endParaRPr lang="fr-FR" dirty="0"/>
           </a:p>
           <a:p>
             <a:pPr lvl="1"/>
             <a:r>
-              <a:rPr lang="fr-FR" dirty="0" smtClean="0"/>
+              <a:rPr lang="fr-FR" dirty="0"/>
               <a:t>PIP </a:t>
             </a:r>
             <a:r>
-              <a:rPr lang="fr-FR" dirty="0" err="1" smtClean="0"/>
+              <a:rPr lang="fr-FR" dirty="0" err="1"/>
               <a:t>install</a:t>
             </a:r>
             <a:r>
-              <a:rPr lang="fr-FR" dirty="0" smtClean="0"/>
-              <a:t> –r </a:t>
-            </a:r>
-            <a:r>
-              <a:rPr lang="fr-FR" dirty="0" smtClean="0"/>
-              <a:t>requirement.txt</a:t>
+              <a:rPr lang="fr-FR" dirty="0"/>
+              <a:t> –</a:t>
+            </a:r>
+            <a:r>
+              <a:rPr lang="fr-FR"/>
+              <a:t>r requirements.</a:t>
+            </a:r>
+            <a:r>
+              <a:rPr lang="fr-FR" dirty="0"/>
+              <a:t>txt</a:t>
             </a:r>
           </a:p>
         </p:txBody>
@@ -3962,13 +3940,6 @@
   <p:clrMapOvr>
     <a:masterClrMapping/>
   </p:clrMapOvr>
-  <p:timing>
-    <p:tnLst>
-      <p:par>
-        <p:cTn id="1" dur="indefinite" restart="never" nodeType="tmRoot"/>
-      </p:par>
-    </p:tnLst>
-  </p:timing>
 </p:sld>
 </file>
 
@@ -4005,10 +3976,9 @@
           <a:lstStyle/>
           <a:p>
             <a:r>
-              <a:rPr lang="fr-FR" dirty="0" smtClean="0"/>
+              <a:rPr lang="fr-FR" dirty="0"/>
               <a:t>Visual Studio</a:t>
             </a:r>
-            <a:endParaRPr lang="fr-FR" dirty="0"/>
           </a:p>
         </p:txBody>
       </p:sp>
@@ -4028,23 +3998,23 @@
           <a:lstStyle/>
           <a:p>
             <a:r>
-              <a:rPr lang="fr-FR" dirty="0" smtClean="0"/>
+              <a:rPr lang="fr-FR" dirty="0"/>
               <a:t>Visual Studio Code</a:t>
             </a:r>
           </a:p>
           <a:p>
             <a:pPr lvl="1"/>
             <a:r>
-              <a:rPr lang="fr-FR" dirty="0" smtClean="0"/>
+              <a:rPr lang="fr-FR" dirty="0"/>
               <a:t>Allez dans Affichage -&gt; Terminal intégré</a:t>
             </a:r>
           </a:p>
           <a:p>
             <a:r>
-              <a:rPr lang="fr-FR" smtClean="0"/>
+              <a:rPr lang="fr-FR"/>
               <a:t>Visual Studio CE</a:t>
             </a:r>
-            <a:endParaRPr lang="fr-FR" dirty="0" smtClean="0"/>
+            <a:endParaRPr lang="fr-FR" dirty="0"/>
           </a:p>
           <a:p>
             <a:pPr lvl="1"/>
@@ -4053,16 +4023,12 @@
               <a:t> </a:t>
             </a:r>
             <a:r>
-              <a:rPr lang="en-US" dirty="0" err="1" smtClean="0"/>
+              <a:rPr lang="en-US" dirty="0" err="1"/>
               <a:t>Outils</a:t>
             </a:r>
             <a:r>
-              <a:rPr lang="en-US" dirty="0" smtClean="0"/>
-              <a:t>-</a:t>
-            </a:r>
-            <a:r>
               <a:rPr lang="en-US" dirty="0"/>
-              <a:t>&gt; Python Tools -&gt; Python Environments.</a:t>
+              <a:t>-&gt; Python Tools -&gt; Python Environments.</a:t>
             </a:r>
             <a:endParaRPr lang="fr-FR" dirty="0"/>
           </a:p>
